--- a/documents/budget_slide.pptx
+++ b/documents/budget_slide.pptx
@@ -259,7 +259,7 @@
           <a:p>
             <a:fld id="{0C6A23BC-1E25-5743-BD4F-5DD6464641D7}" type="datetimeFigureOut">
               <a:rPr lang="en-US" smtClean="0"/>
-              <a:t>3/12/26</a:t>
+              <a:t>3/15/26</a:t>
             </a:fld>
             <a:endParaRPr lang="en-US"/>
           </a:p>
@@ -457,7 +457,7 @@
           <a:p>
             <a:fld id="{0C6A23BC-1E25-5743-BD4F-5DD6464641D7}" type="datetimeFigureOut">
               <a:rPr lang="en-US" smtClean="0"/>
-              <a:t>3/12/26</a:t>
+              <a:t>3/15/26</a:t>
             </a:fld>
             <a:endParaRPr lang="en-US"/>
           </a:p>
@@ -665,7 +665,7 @@
           <a:p>
             <a:fld id="{0C6A23BC-1E25-5743-BD4F-5DD6464641D7}" type="datetimeFigureOut">
               <a:rPr lang="en-US" smtClean="0"/>
-              <a:t>3/12/26</a:t>
+              <a:t>3/15/26</a:t>
             </a:fld>
             <a:endParaRPr lang="en-US"/>
           </a:p>
@@ -863,7 +863,7 @@
           <a:p>
             <a:fld id="{0C6A23BC-1E25-5743-BD4F-5DD6464641D7}" type="datetimeFigureOut">
               <a:rPr lang="en-US" smtClean="0"/>
-              <a:t>3/12/26</a:t>
+              <a:t>3/15/26</a:t>
             </a:fld>
             <a:endParaRPr lang="en-US"/>
           </a:p>
@@ -1138,7 +1138,7 @@
           <a:p>
             <a:fld id="{0C6A23BC-1E25-5743-BD4F-5DD6464641D7}" type="datetimeFigureOut">
               <a:rPr lang="en-US" smtClean="0"/>
-              <a:t>3/12/26</a:t>
+              <a:t>3/15/26</a:t>
             </a:fld>
             <a:endParaRPr lang="en-US"/>
           </a:p>
@@ -1403,7 +1403,7 @@
           <a:p>
             <a:fld id="{0C6A23BC-1E25-5743-BD4F-5DD6464641D7}" type="datetimeFigureOut">
               <a:rPr lang="en-US" smtClean="0"/>
-              <a:t>3/12/26</a:t>
+              <a:t>3/15/26</a:t>
             </a:fld>
             <a:endParaRPr lang="en-US"/>
           </a:p>
@@ -1815,7 +1815,7 @@
           <a:p>
             <a:fld id="{0C6A23BC-1E25-5743-BD4F-5DD6464641D7}" type="datetimeFigureOut">
               <a:rPr lang="en-US" smtClean="0"/>
-              <a:t>3/12/26</a:t>
+              <a:t>3/15/26</a:t>
             </a:fld>
             <a:endParaRPr lang="en-US"/>
           </a:p>
@@ -1956,7 +1956,7 @@
           <a:p>
             <a:fld id="{0C6A23BC-1E25-5743-BD4F-5DD6464641D7}" type="datetimeFigureOut">
               <a:rPr lang="en-US" smtClean="0"/>
-              <a:t>3/12/26</a:t>
+              <a:t>3/15/26</a:t>
             </a:fld>
             <a:endParaRPr lang="en-US"/>
           </a:p>
@@ -2069,7 +2069,7 @@
           <a:p>
             <a:fld id="{0C6A23BC-1E25-5743-BD4F-5DD6464641D7}" type="datetimeFigureOut">
               <a:rPr lang="en-US" smtClean="0"/>
-              <a:t>3/12/26</a:t>
+              <a:t>3/15/26</a:t>
             </a:fld>
             <a:endParaRPr lang="en-US"/>
           </a:p>
@@ -2380,7 +2380,7 @@
           <a:p>
             <a:fld id="{0C6A23BC-1E25-5743-BD4F-5DD6464641D7}" type="datetimeFigureOut">
               <a:rPr lang="en-US" smtClean="0"/>
-              <a:t>3/12/26</a:t>
+              <a:t>3/15/26</a:t>
             </a:fld>
             <a:endParaRPr lang="en-US"/>
           </a:p>
@@ -2668,7 +2668,7 @@
           <a:p>
             <a:fld id="{0C6A23BC-1E25-5743-BD4F-5DD6464641D7}" type="datetimeFigureOut">
               <a:rPr lang="en-US" smtClean="0"/>
-              <a:t>3/12/26</a:t>
+              <a:t>3/15/26</a:t>
             </a:fld>
             <a:endParaRPr lang="en-US"/>
           </a:p>
@@ -2909,7 +2909,7 @@
           <a:p>
             <a:fld id="{0C6A23BC-1E25-5743-BD4F-5DD6464641D7}" type="datetimeFigureOut">
               <a:rPr lang="en-US" smtClean="0"/>
-              <a:t>3/12/26</a:t>
+              <a:t>3/15/26</a:t>
             </a:fld>
             <a:endParaRPr lang="en-US"/>
           </a:p>
@@ -3332,12 +3332,118 @@
           <a:chExt cx="0" cy="0"/>
         </a:xfrm>
       </p:grpSpPr>
+      <p:sp>
+        <p:nvSpPr>
+          <p:cNvPr id="6" name="TextBox 5">
+            <a:extLst>
+              <a:ext uri="{FF2B5EF4-FFF2-40B4-BE49-F238E27FC236}">
+                <a16:creationId xmlns:a16="http://schemas.microsoft.com/office/drawing/2014/main" id="{6310DF2D-BFD7-51B4-25A2-4A82F82A081A}"/>
+              </a:ext>
+            </a:extLst>
+          </p:cNvPr>
+          <p:cNvSpPr txBox="1"/>
+          <p:nvPr/>
+        </p:nvSpPr>
+        <p:spPr>
+          <a:xfrm>
+            <a:off x="194738" y="837135"/>
+            <a:ext cx="7837111" cy="1477328"/>
+          </a:xfrm>
+          <a:prstGeom prst="rect">
+            <a:avLst/>
+          </a:prstGeom>
+          <a:noFill/>
+        </p:spPr>
+        <p:txBody>
+          <a:bodyPr wrap="square" rtlCol="0">
+            <a:spAutoFit/>
+          </a:bodyPr>
+          <a:lstStyle/>
+          <a:p>
+            <a:r>
+              <a:rPr lang="en-US" b="1" dirty="0"/>
+              <a:t>Base budget</a:t>
+            </a:r>
+          </a:p>
+          <a:p>
+            <a:pPr marL="285750" indent="-285750">
+              <a:buFont typeface="Arial" panose="020B0604020202020204" pitchFamily="34" charset="0"/>
+              <a:buChar char="•"/>
+            </a:pPr>
+            <a:r>
+              <a:rPr lang="en-US" dirty="0"/>
+              <a:t>The budget breaks even at 500 participants (see right).  </a:t>
+            </a:r>
+          </a:p>
+          <a:p>
+            <a:pPr marL="285750" indent="-285750">
+              <a:buFont typeface="Arial" panose="020B0604020202020204" pitchFamily="34" charset="0"/>
+              <a:buChar char="•"/>
+            </a:pPr>
+            <a:r>
+              <a:rPr lang="en-US" dirty="0"/>
+              <a:t>A worst case scenario with 300 participants results in a $80k surplus.  </a:t>
+            </a:r>
+          </a:p>
+          <a:p>
+            <a:pPr marL="285750" indent="-285750">
+              <a:buFont typeface="Arial" panose="020B0604020202020204" pitchFamily="34" charset="0"/>
+              <a:buChar char="•"/>
+            </a:pPr>
+            <a:r>
+              <a:rPr lang="en-US" dirty="0"/>
+              <a:t>A best case scenario with 800 participants results in a $354k surplus.  </a:t>
+            </a:r>
+          </a:p>
+          <a:p>
+            <a:r>
+              <a:rPr lang="en-US" dirty="0"/>
+              <a:t>(Previous conferences have had about 700 participants.)</a:t>
+            </a:r>
+          </a:p>
+        </p:txBody>
+      </p:sp>
+      <p:sp>
+        <p:nvSpPr>
+          <p:cNvPr id="7" name="TextBox 6">
+            <a:extLst>
+              <a:ext uri="{FF2B5EF4-FFF2-40B4-BE49-F238E27FC236}">
+                <a16:creationId xmlns:a16="http://schemas.microsoft.com/office/drawing/2014/main" id="{699FD24F-6A47-4472-D086-483C23758F83}"/>
+              </a:ext>
+            </a:extLst>
+          </p:cNvPr>
+          <p:cNvSpPr txBox="1"/>
+          <p:nvPr/>
+        </p:nvSpPr>
+        <p:spPr>
+          <a:xfrm>
+            <a:off x="1036747" y="166613"/>
+            <a:ext cx="6153095" cy="523220"/>
+          </a:xfrm>
+          <a:prstGeom prst="rect">
+            <a:avLst/>
+          </a:prstGeom>
+          <a:noFill/>
+        </p:spPr>
+        <p:txBody>
+          <a:bodyPr wrap="none" rtlCol="0">
+            <a:spAutoFit/>
+          </a:bodyPr>
+          <a:lstStyle/>
+          <a:p>
+            <a:r>
+              <a:rPr lang="en-US" sz="2800" b="1" dirty="0"/>
+              <a:t>Consciousness Science 2026 budget</a:t>
+            </a:r>
+          </a:p>
+        </p:txBody>
+      </p:sp>
       <p:pic>
         <p:nvPicPr>
-          <p:cNvPr id="5" name="Picture 4">
-            <a:extLst>
-              <a:ext uri="{FF2B5EF4-FFF2-40B4-BE49-F238E27FC236}">
-                <a16:creationId xmlns:a16="http://schemas.microsoft.com/office/drawing/2014/main" id="{A29EA49B-60C3-CEF3-0B27-3AD8DBFE11B3}"/>
+          <p:cNvPr id="3" name="Picture 2" descr="A table with numbers and words&#10;&#10;AI-generated content may be incorrect.">
+            <a:extLst>
+              <a:ext uri="{FF2B5EF4-FFF2-40B4-BE49-F238E27FC236}">
+                <a16:creationId xmlns:a16="http://schemas.microsoft.com/office/drawing/2014/main" id="{E0F05605-4F33-C3E3-D93D-7DC6D99D31FA}"/>
               </a:ext>
             </a:extLst>
           </p:cNvPr>
@@ -3354,20 +3460,50 @@
         </p:blipFill>
         <p:spPr>
           <a:xfrm>
-            <a:off x="8292904" y="0"/>
-            <a:ext cx="3728132" cy="6858000"/>
+            <a:off x="2114563" y="4431767"/>
+            <a:ext cx="3577374" cy="1426004"/>
           </a:xfrm>
           <a:prstGeom prst="rect">
             <a:avLst/>
           </a:prstGeom>
         </p:spPr>
       </p:pic>
-      <p:sp>
-        <p:nvSpPr>
-          <p:cNvPr id="6" name="TextBox 5">
-            <a:extLst>
-              <a:ext uri="{FF2B5EF4-FFF2-40B4-BE49-F238E27FC236}">
-                <a16:creationId xmlns:a16="http://schemas.microsoft.com/office/drawing/2014/main" id="{6310DF2D-BFD7-51B4-25A2-4A82F82A081A}"/>
+      <p:pic>
+        <p:nvPicPr>
+          <p:cNvPr id="8" name="Picture 7" descr="A spreadsheet with text and numbers&#10;&#10;AI-generated content may be incorrect.">
+            <a:extLst>
+              <a:ext uri="{FF2B5EF4-FFF2-40B4-BE49-F238E27FC236}">
+                <a16:creationId xmlns:a16="http://schemas.microsoft.com/office/drawing/2014/main" id="{F7EBCEC1-940C-2769-A66E-C3A3FBCCE97C}"/>
+              </a:ext>
+            </a:extLst>
+          </p:cNvPr>
+          <p:cNvPicPr>
+            <a:picLocks noChangeAspect="1"/>
+          </p:cNvPicPr>
+          <p:nvPr/>
+        </p:nvPicPr>
+        <p:blipFill>
+          <a:blip r:embed="rId3"/>
+          <a:stretch>
+            <a:fillRect/>
+          </a:stretch>
+        </p:blipFill>
+        <p:spPr>
+          <a:xfrm>
+            <a:off x="8851317" y="0"/>
+            <a:ext cx="3340683" cy="6858000"/>
+          </a:xfrm>
+          <a:prstGeom prst="rect">
+            <a:avLst/>
+          </a:prstGeom>
+        </p:spPr>
+      </p:pic>
+      <p:sp>
+        <p:nvSpPr>
+          <p:cNvPr id="9" name="TextBox 8">
+            <a:extLst>
+              <a:ext uri="{FF2B5EF4-FFF2-40B4-BE49-F238E27FC236}">
+                <a16:creationId xmlns:a16="http://schemas.microsoft.com/office/drawing/2014/main" id="{8F3909EF-2D4B-89E0-8F91-653621515D2A}"/>
               </a:ext>
             </a:extLst>
           </p:cNvPr>
@@ -3376,8 +3512,8 @@
         </p:nvSpPr>
         <p:spPr>
           <a:xfrm>
-            <a:off x="194738" y="837135"/>
-            <a:ext cx="7837111" cy="5632311"/>
+            <a:off x="194738" y="2870988"/>
+            <a:ext cx="7688873" cy="2031325"/>
           </a:xfrm>
           <a:prstGeom prst="rect">
             <a:avLst/>
@@ -3392,7 +3528,7 @@
           <a:p>
             <a:r>
               <a:rPr lang="en-US" b="1" dirty="0"/>
-              <a:t>Base budget</a:t>
+              <a:t>Additional IONS specific optional expenses</a:t>
             </a:r>
           </a:p>
           <a:p>
@@ -3402,7 +3538,15 @@
             </a:pPr>
             <a:r>
               <a:rPr lang="en-US" dirty="0"/>
-              <a:t>The budget breaks even at 550 participants (see right).  </a:t>
+              <a:t>The conference could be fully managed by contractor Abi Behar Montefiore, as she has in the past. This is included in the budget and priced at $45k for six months, starting July 1</a:t>
+            </a:r>
+            <a:r>
+              <a:rPr lang="en-US" baseline="30000" dirty="0"/>
+              <a:t>st</a:t>
+            </a:r>
+            <a:r>
+              <a:rPr lang="en-US" dirty="0"/>
+              <a:t>.</a:t>
             </a:r>
           </a:p>
           <a:p>
@@ -3412,162 +3556,11 @@
             </a:pPr>
             <a:r>
               <a:rPr lang="en-US" dirty="0"/>
-              <a:t>A worst case scenario with 300 participants results in a $130k deficit.  </a:t>
-            </a:r>
-          </a:p>
-          <a:p>
-            <a:pPr marL="285750" indent="-285750">
-              <a:buFont typeface="Arial" panose="020B0604020202020204" pitchFamily="34" charset="0"/>
-              <a:buChar char="•"/>
-            </a:pPr>
-            <a:r>
-              <a:rPr lang="en-US" dirty="0"/>
-              <a:t>A best case scenario with 800 participants results in a $144k surplus.  </a:t>
-            </a:r>
-          </a:p>
-          <a:p>
-            <a:r>
-              <a:rPr lang="en-US" dirty="0"/>
-              <a:t>(Previous conferences have had about 700 participants.)</a:t>
+              <a:t>Optional IONS staff full production is estimated to requite an additional $209k.  </a:t>
             </a:r>
           </a:p>
           <a:p>
             <a:endParaRPr lang="en-US" dirty="0"/>
-          </a:p>
-          <a:p>
-            <a:r>
-              <a:rPr lang="en-US" b="1" dirty="0"/>
-              <a:t>Additional IONS specific optional expenses</a:t>
-            </a:r>
-          </a:p>
-          <a:p>
-            <a:pPr marL="285750" indent="-285750">
-              <a:buFont typeface="Arial" panose="020B0604020202020204" pitchFamily="34" charset="0"/>
-              <a:buChar char="•"/>
-            </a:pPr>
-            <a:r>
-              <a:rPr lang="en-US" dirty="0"/>
-              <a:t>The conference could be fully managed by contractor Abi Behar Montefiore. This is included in the budget and priced at $45k for six months.  </a:t>
-            </a:r>
-          </a:p>
-          <a:p>
-            <a:pPr marL="285750" indent="-285750">
-              <a:buFont typeface="Arial" panose="020B0604020202020204" pitchFamily="34" charset="0"/>
-              <a:buChar char="•"/>
-            </a:pPr>
-            <a:r>
-              <a:rPr lang="en-US" dirty="0"/>
-              <a:t>Optional IONS staff involvement is estimated at $174k in salary.  </a:t>
-            </a:r>
-          </a:p>
-          <a:p>
-            <a:pPr marL="285750" indent="-285750">
-              <a:buFont typeface="Arial" panose="020B0604020202020204" pitchFamily="34" charset="0"/>
-              <a:buChar char="•"/>
-            </a:pPr>
-            <a:r>
-              <a:rPr lang="en-US" dirty="0"/>
-              <a:t>An optional IONS staff conference booth and travel are estimated at $33k.</a:t>
-            </a:r>
-          </a:p>
-          <a:p>
-            <a:endParaRPr lang="en-US" dirty="0"/>
-          </a:p>
-          <a:p>
-            <a:r>
-              <a:rPr lang="en-US" b="1" dirty="0"/>
-              <a:t>Additional potential revenues not included in the budget</a:t>
-            </a:r>
-            <a:endParaRPr lang="en-US" dirty="0"/>
-          </a:p>
-          <a:p>
-            <a:pPr marL="285750" indent="-285750">
-              <a:buFont typeface="Arial" panose="020B0604020202020204" pitchFamily="34" charset="0"/>
-              <a:buChar char="•"/>
-            </a:pPr>
-            <a:r>
-              <a:rPr lang="en-US" dirty="0"/>
-              <a:t>Eugene </a:t>
-            </a:r>
-            <a:r>
-              <a:rPr lang="en-US" dirty="0" err="1"/>
-              <a:t>Jhong</a:t>
-            </a:r>
-            <a:r>
-              <a:rPr lang="en-US" dirty="0"/>
-              <a:t> has pledged to cover up to $200k (email dated 3/12/2026).  </a:t>
-            </a:r>
-          </a:p>
-          <a:p>
-            <a:endParaRPr lang="en-US" dirty="0"/>
-          </a:p>
-          <a:p>
-            <a:r>
-              <a:rPr lang="en-US" dirty="0">
-                <a:solidFill>
-                  <a:srgbClr val="00B050"/>
-                </a:solidFill>
-              </a:rPr>
-              <a:t>Assuming we receive a $200k donation, even in a worst-case scenario with 330 participants and without additional IONS staff involvement, the conference would still end with an </a:t>
-            </a:r>
-            <a:r>
-              <a:rPr lang="en-US">
-                <a:solidFill>
-                  <a:srgbClr val="00B050"/>
-                </a:solidFill>
-              </a:rPr>
-              <a:t>estimated $70k </a:t>
-            </a:r>
-            <a:r>
-              <a:rPr lang="en-US" dirty="0">
-                <a:solidFill>
-                  <a:srgbClr val="00B050"/>
-                </a:solidFill>
-              </a:rPr>
-              <a:t>surplus.</a:t>
-            </a:r>
-          </a:p>
-          <a:p>
-            <a:pPr marL="285750" indent="-285750">
-              <a:buFontTx/>
-              <a:buChar char="-"/>
-            </a:pPr>
-            <a:endParaRPr lang="en-US" dirty="0"/>
-          </a:p>
-        </p:txBody>
-      </p:sp>
-      <p:sp>
-        <p:nvSpPr>
-          <p:cNvPr id="7" name="TextBox 6">
-            <a:extLst>
-              <a:ext uri="{FF2B5EF4-FFF2-40B4-BE49-F238E27FC236}">
-                <a16:creationId xmlns:a16="http://schemas.microsoft.com/office/drawing/2014/main" id="{699FD24F-6A47-4472-D086-483C23758F83}"/>
-              </a:ext>
-            </a:extLst>
-          </p:cNvPr>
-          <p:cNvSpPr txBox="1"/>
-          <p:nvPr/>
-        </p:nvSpPr>
-        <p:spPr>
-          <a:xfrm>
-            <a:off x="1036747" y="166613"/>
-            <a:ext cx="6153095" cy="523220"/>
-          </a:xfrm>
-          <a:prstGeom prst="rect">
-            <a:avLst/>
-          </a:prstGeom>
-          <a:noFill/>
-        </p:spPr>
-        <p:txBody>
-          <a:bodyPr wrap="none" rtlCol="0">
-            <a:spAutoFit/>
-          </a:bodyPr>
-          <a:lstStyle/>
-          <a:p>
-            <a:r>
-              <a:rPr lang="en-US" sz="2800" b="1" dirty="0"/>
-              <a:t>Consciousness Science 2026 budget</a:t>
-            </a:r>
           </a:p>
         </p:txBody>
       </p:sp>
